--- a/assets/figures-editable/c1-c2/c2-e35.pptx
+++ b/assets/figures-editable/c1-c2/c2-e35.pptx
@@ -7,7 +7,7 @@
   <p:sldIdLst>
     <p:sldId id="256" r:id="rId7"/>
   </p:sldIdLst>
-  <p:sldSz cx="11948160" cy="8095488" type="screen4x3"/>
+  <p:sldSz cx="12191695" cy="6858000" type="screen4x3"/>
   <p:notesSz cx="6858000" cy="9144000"/>
   <p:defaultTextStyle>
     <a:defPPr>
@@ -3098,14 +3098,14 @@
       <p:grpSpPr/>
       <p:sp>
         <p:nvSpPr>
-          <p:cNvPr id="2" name="text1" descr="sci-ppt:C2-E35-001"/>
+          <p:cNvPr id="2" name="C2-E35 text 0" descr="sci-ppt:o000"/>
           <p:cNvSpPr txBox="1"/>
           <p:nvPr/>
         </p:nvSpPr>
         <p:spPr>
           <a:xfrm>
-            <a:off x="316992" y="268224"/>
-            <a:ext cx="11277600" cy="359054"/>
+            <a:off x="274320" y="118872"/>
+            <a:ext cx="11612880" cy="340105"/>
           </a:xfrm>
           <a:prstGeom prst="rect">
             <a:avLst/>
@@ -3114,7 +3114,7 @@
           <a:effectLst/>
         </p:spPr>
         <p:txBody>
-          <a:bodyPr wrap="none" lIns="27432" rIns="27432" tIns="18288" bIns="18288" anchor="ctr">
+          <a:bodyPr wrap="none" lIns="18288" rIns="18288" tIns="18288" bIns="18288" anchor="t">
             <a:spAutoFit/>
           </a:bodyPr>
           <a:lstStyle/>
@@ -3125,37 +3125,37 @@
               </a:spcAft>
             </a:pPr>
             <a:r>
-              <a:rPr sz="1823" b="0" i="0">
+              <a:rPr sz="1900" b="1" i="0">
                 <a:solidFill>
                   <a:srgbClr val="8EDBD4"/>
                 </a:solidFill>
                 <a:latin typeface="Arial"/>
               </a:rPr>
-              <a:t>C2-E35 | Physical-variable diagram</a:t>
-            </a:r>
-          </a:p>
-        </p:txBody>
-      </p:sp>
-      <p:sp>
-        <p:nvSpPr>
-          <p:cNvPr id="3" name="rect2" descr="sci-ppt:C2-E35-002"/>
+              <a:t>C2-E35 · Original inventory and pressure formulas for Defense 3</a:t>
+            </a:r>
+          </a:p>
+        </p:txBody>
+      </p:sp>
+      <p:sp>
+        <p:nvSpPr>
+          <p:cNvPr id="3" name="C2-E35 round_rect 1" descr="sci-ppt:o001"/>
           <p:cNvSpPr/>
           <p:nvPr/>
         </p:nvSpPr>
         <p:spPr>
           <a:xfrm>
-            <a:off x="975360" y="1706880"/>
-            <a:ext cx="3535680" cy="1341120"/>
+            <a:off x="457200" y="1097280"/>
+            <a:ext cx="3657600" cy="2834640"/>
           </a:xfrm>
-          <a:prstGeom prst="rect">
+          <a:prstGeom prst="roundRect">
             <a:avLst/>
           </a:prstGeom>
           <a:solidFill>
             <a:srgbClr val="213E4B"/>
           </a:solidFill>
-          <a:ln w="19050">
+          <a:ln w="20320">
             <a:solidFill>
-              <a:srgbClr val="B4C7D2"/>
+              <a:srgbClr val="8EDBD4"/>
             </a:solidFill>
           </a:ln>
           <a:effectLst/>
@@ -3170,14 +3170,14 @@
       </p:sp>
       <p:sp>
         <p:nvSpPr>
-          <p:cNvPr id="4" name="text3" descr="sci-ppt:C2-E35-003"/>
+          <p:cNvPr id="4" name="C2-E35 text 2" descr="sci-ppt:o002"/>
           <p:cNvSpPr txBox="1"/>
           <p:nvPr/>
         </p:nvSpPr>
         <p:spPr>
           <a:xfrm>
-            <a:off x="1097280" y="1828800"/>
-            <a:ext cx="3352800" cy="340156"/>
+            <a:off x="548640" y="1188720"/>
+            <a:ext cx="3474720" cy="270383"/>
           </a:xfrm>
           <a:prstGeom prst="rect">
             <a:avLst/>
@@ -3186,94 +3186,38 @@
           <a:effectLst/>
         </p:spPr>
         <p:txBody>
-          <a:bodyPr wrap="none" lIns="27432" rIns="27432" tIns="18288" bIns="18288" anchor="ctr">
+          <a:bodyPr wrap="none" lIns="18288" rIns="18288" tIns="18288" bIns="18288" anchor="t">
             <a:spAutoFit/>
           </a:bodyPr>
           <a:lstStyle/>
           <a:p>
-            <a:pPr algn="l">
+            <a:pPr algn="ctr">
               <a:spcAft>
                 <a:spcPts val="0"/>
               </a:spcAft>
             </a:pPr>
             <a:r>
-              <a:rPr sz="1728" b="0" i="0">
+              <a:rPr sz="1450" b="1" i="0">
                 <a:solidFill>
-                  <a:srgbClr val="E7F0F3"/>
+                  <a:srgbClr val="8EDBD4"/>
                 </a:solidFill>
                 <a:latin typeface="Arial"/>
               </a:rPr>
-              <a:t>Initial PFC mass m_PFC,0</a:t>
-            </a:r>
-          </a:p>
-        </p:txBody>
-      </p:sp>
-      <p:cxnSp>
-        <p:nvCxnSpPr>
-          <p:cNvPr id="5" name="arrow4" descr="sci-ppt:C2-E35-004"/>
-          <p:cNvCxnSpPr/>
+              <a:t>Initial mass</a:t>
+            </a:r>
+          </a:p>
+        </p:txBody>
+      </p:sp>
+      <p:sp>
+        <p:nvSpPr>
+          <p:cNvPr id="5" name="C2-E35 text 3" descr="sci-ppt:o003"/>
+          <p:cNvSpPr txBox="1"/>
           <p:nvPr/>
-        </p:nvCxnSpPr>
+        </p:nvSpPr>
         <p:spPr>
           <a:xfrm>
-            <a:off x="4632960" y="2377440"/>
-            <a:ext cx="1219200" cy="0"/>
-          </a:xfrm>
-          <a:prstGeom prst="line">
-            <a:avLst/>
-          </a:prstGeom>
-          <a:ln w="25400">
-            <a:solidFill>
-              <a:srgbClr val="8EDBD4"/>
-            </a:solidFill>
-            <a:headEnd type="none" w="med" len="med"/>
-            <a:tailEnd type="triangle" w="med" len="med"/>
-          </a:ln>
-          <a:effectLst/>
-        </p:spPr>
-      </p:cxnSp>
-      <p:sp>
-        <p:nvSpPr>
-          <p:cNvPr id="6" name="rect5" descr="sci-ppt:C2-E35-005"/>
-          <p:cNvSpPr/>
-          <p:nvPr/>
-        </p:nvSpPr>
-        <p:spPr>
-          <a:xfrm>
-            <a:off x="6217920" y="1219200"/>
-            <a:ext cx="2499360" cy="1158240"/>
-          </a:xfrm>
-          <a:prstGeom prst="rect">
-            <a:avLst/>
-          </a:prstGeom>
-          <a:solidFill>
-            <a:srgbClr val="213E4B"/>
-          </a:solidFill>
-          <a:ln w="19050">
-            <a:solidFill>
-              <a:srgbClr val="B4C7D2"/>
-            </a:solidFill>
-          </a:ln>
-          <a:effectLst/>
-        </p:spPr>
-        <p:txBody>
-          <a:bodyPr rtlCol="0" anchor="ctr"/>
-          <a:lstStyle/>
-          <a:p>
-            <a:pPr algn="ctr"/>
-          </a:p>
-        </p:txBody>
-      </p:sp>
-      <p:sp>
-        <p:nvSpPr>
-          <p:cNvPr id="7" name="text6" descr="sci-ppt:C2-E35-006"/>
-          <p:cNvSpPr txBox="1"/>
-          <p:nvPr/>
-        </p:nvSpPr>
-        <p:spPr>
-          <a:xfrm>
-            <a:off x="6339840" y="1341120"/>
-            <a:ext cx="2316480" cy="340156"/>
+            <a:off x="548640" y="1920240"/>
+            <a:ext cx="3474720" cy="262636"/>
           </a:xfrm>
           <a:prstGeom prst="rect">
             <a:avLst/>
@@ -3282,70 +3226,38 @@
           <a:effectLst/>
         </p:spPr>
         <p:txBody>
-          <a:bodyPr wrap="none" lIns="27432" rIns="27432" tIns="18288" bIns="18288" anchor="ctr">
+          <a:bodyPr wrap="none" lIns="18288" rIns="18288" tIns="18288" bIns="18288" anchor="t">
             <a:spAutoFit/>
           </a:bodyPr>
           <a:lstStyle/>
           <a:p>
-            <a:pPr algn="l">
+            <a:pPr algn="ctr">
               <a:spcAft>
                 <a:spcPts val="0"/>
               </a:spcAft>
             </a:pPr>
             <a:r>
-              <a:rPr sz="1728" b="0" i="0">
+              <a:rPr sz="1400" b="1" i="0">
                 <a:solidFill>
                   <a:srgbClr val="E7F0F3"/>
                 </a:solidFill>
                 <a:latin typeface="Arial"/>
               </a:rPr>
-              <a:t>Liquid m_l</a:t>
-            </a:r>
-          </a:p>
-        </p:txBody>
-      </p:sp>
-      <p:sp>
-        <p:nvSpPr>
-          <p:cNvPr id="8" name="rect7" descr="sci-ppt:C2-E35-007"/>
-          <p:cNvSpPr/>
+              <a:t>m_PFC,0 = (4π/3) ρ_d a₀³</a:t>
+            </a:r>
+          </a:p>
+        </p:txBody>
+      </p:sp>
+      <p:sp>
+        <p:nvSpPr>
+          <p:cNvPr id="6" name="C2-E35 text 4" descr="sci-ppt:o004"/>
+          <p:cNvSpPr txBox="1"/>
           <p:nvPr/>
         </p:nvSpPr>
         <p:spPr>
           <a:xfrm>
-            <a:off x="8900160" y="1219200"/>
-            <a:ext cx="2499360" cy="1158240"/>
-          </a:xfrm>
-          <a:prstGeom prst="rect">
-            <a:avLst/>
-          </a:prstGeom>
-          <a:solidFill>
-            <a:srgbClr val="213E4B"/>
-          </a:solidFill>
-          <a:ln w="19050">
-            <a:solidFill>
-              <a:srgbClr val="B4C7D2"/>
-            </a:solidFill>
-          </a:ln>
-          <a:effectLst/>
-        </p:spPr>
-        <p:txBody>
-          <a:bodyPr rtlCol="0" anchor="ctr"/>
-          <a:lstStyle/>
-          <a:p>
-            <a:pPr algn="ctr"/>
-          </a:p>
-        </p:txBody>
-      </p:sp>
-      <p:sp>
-        <p:nvSpPr>
-          <p:cNvPr id="9" name="text8" descr="sci-ppt:C2-E35-008"/>
-          <p:cNvSpPr txBox="1"/>
-          <p:nvPr/>
-        </p:nvSpPr>
-        <p:spPr>
-          <a:xfrm>
-            <a:off x="9022080" y="1341120"/>
-            <a:ext cx="2316480" cy="340156"/>
+            <a:off x="548640" y="3291840"/>
+            <a:ext cx="3474720" cy="231648"/>
           </a:xfrm>
           <a:prstGeom prst="rect">
             <a:avLst/>
@@ -3354,48 +3266,48 @@
           <a:effectLst/>
         </p:spPr>
         <p:txBody>
-          <a:bodyPr wrap="none" lIns="27432" rIns="27432" tIns="18288" bIns="18288" anchor="ctr">
+          <a:bodyPr wrap="none" lIns="18288" rIns="18288" tIns="18288" bIns="18288" anchor="t">
             <a:spAutoFit/>
           </a:bodyPr>
           <a:lstStyle/>
           <a:p>
-            <a:pPr algn="l">
+            <a:pPr algn="ctr">
               <a:spcAft>
                 <a:spcPts val="0"/>
               </a:spcAft>
             </a:pPr>
             <a:r>
-              <a:rPr sz="1728" b="0" i="0">
+              <a:rPr sz="1200" b="0" i="0">
                 <a:solidFill>
-                  <a:srgbClr val="E7F0F3"/>
+                  <a:srgbClr val="B4C7D2"/>
                 </a:solidFill>
                 <a:latin typeface="Arial"/>
               </a:rPr>
-              <a:t>Vapor m_v</a:t>
-            </a:r>
-          </a:p>
-        </p:txBody>
-      </p:sp>
-      <p:sp>
-        <p:nvSpPr>
-          <p:cNvPr id="10" name="rect9" descr="sci-ppt:C2-E35-009"/>
+              <a:t>fixed by the real core volume</a:t>
+            </a:r>
+          </a:p>
+        </p:txBody>
+      </p:sp>
+      <p:sp>
+        <p:nvSpPr>
+          <p:cNvPr id="7" name="C2-E35 round_rect 5" descr="sci-ppt:o005"/>
           <p:cNvSpPr/>
           <p:nvPr/>
         </p:nvSpPr>
         <p:spPr>
           <a:xfrm>
-            <a:off x="6217920" y="2804160"/>
-            <a:ext cx="2499360" cy="1158240"/>
+            <a:off x="4297680" y="1097280"/>
+            <a:ext cx="3657600" cy="2834640"/>
           </a:xfrm>
-          <a:prstGeom prst="rect">
+          <a:prstGeom prst="roundRect">
             <a:avLst/>
           </a:prstGeom>
           <a:solidFill>
             <a:srgbClr val="213E4B"/>
           </a:solidFill>
-          <a:ln w="19050">
+          <a:ln w="20320">
             <a:solidFill>
-              <a:srgbClr val="B4C7D2"/>
+              <a:srgbClr val="F2B880"/>
             </a:solidFill>
           </a:ln>
           <a:effectLst/>
@@ -3410,14 +3322,14 @@
       </p:sp>
       <p:sp>
         <p:nvSpPr>
-          <p:cNvPr id="11" name="text10" descr="sci-ppt:C2-E35-010"/>
+          <p:cNvPr id="8" name="C2-E35 text 6" descr="sci-ppt:o006"/>
           <p:cNvSpPr txBox="1"/>
           <p:nvPr/>
         </p:nvSpPr>
         <p:spPr>
           <a:xfrm>
-            <a:off x="6339840" y="2926080"/>
-            <a:ext cx="2316480" cy="340156"/>
+            <a:off x="4389120" y="1188720"/>
+            <a:ext cx="3474720" cy="270383"/>
           </a:xfrm>
           <a:prstGeom prst="rect">
             <a:avLst/>
@@ -3426,70 +3338,38 @@
           <a:effectLst/>
         </p:spPr>
         <p:txBody>
-          <a:bodyPr wrap="none" lIns="27432" rIns="27432" tIns="18288" bIns="18288" anchor="ctr">
+          <a:bodyPr wrap="none" lIns="18288" rIns="18288" tIns="18288" bIns="18288" anchor="t">
             <a:spAutoFit/>
           </a:bodyPr>
           <a:lstStyle/>
           <a:p>
-            <a:pPr algn="l">
+            <a:pPr algn="ctr">
               <a:spcAft>
                 <a:spcPts val="0"/>
               </a:spcAft>
             </a:pPr>
             <a:r>
-              <a:rPr sz="1728" b="0" i="0">
+              <a:rPr sz="1450" b="1" i="0">
                 <a:solidFill>
-                  <a:srgbClr val="E7F0F3"/>
+                  <a:srgbClr val="F2B880"/>
                 </a:solidFill>
                 <a:latin typeface="Arial"/>
               </a:rPr>
-              <a:t>Dissolved m_diss</a:t>
-            </a:r>
-          </a:p>
-        </p:txBody>
-      </p:sp>
-      <p:sp>
-        <p:nvSpPr>
-          <p:cNvPr id="12" name="rect11" descr="sci-ppt:C2-E35-011"/>
-          <p:cNvSpPr/>
+              <a:t>Ledger</a:t>
+            </a:r>
+          </a:p>
+        </p:txBody>
+      </p:sp>
+      <p:sp>
+        <p:nvSpPr>
+          <p:cNvPr id="9" name="C2-E35 text 7" descr="sci-ppt:o007"/>
+          <p:cNvSpPr txBox="1"/>
           <p:nvPr/>
         </p:nvSpPr>
         <p:spPr>
           <a:xfrm>
-            <a:off x="8900160" y="2804160"/>
-            <a:ext cx="2499360" cy="1158240"/>
-          </a:xfrm>
-          <a:prstGeom prst="rect">
-            <a:avLst/>
-          </a:prstGeom>
-          <a:solidFill>
-            <a:srgbClr val="213E4B"/>
-          </a:solidFill>
-          <a:ln w="19050">
-            <a:solidFill>
-              <a:srgbClr val="B4C7D2"/>
-            </a:solidFill>
-          </a:ln>
-          <a:effectLst/>
-        </p:spPr>
-        <p:txBody>
-          <a:bodyPr rtlCol="0" anchor="ctr"/>
-          <a:lstStyle/>
-          <a:p>
-            <a:pPr algn="ctr"/>
-          </a:p>
-        </p:txBody>
-      </p:sp>
-      <p:sp>
-        <p:nvSpPr>
-          <p:cNvPr id="13" name="text12" descr="sci-ppt:C2-E35-012"/>
-          <p:cNvSpPr txBox="1"/>
-          <p:nvPr/>
-        </p:nvSpPr>
-        <p:spPr>
-          <a:xfrm>
-            <a:off x="9022080" y="2926080"/>
-            <a:ext cx="2316480" cy="340156"/>
+            <a:off x="4389120" y="1920240"/>
+            <a:ext cx="3474720" cy="262636"/>
           </a:xfrm>
           <a:prstGeom prst="rect">
             <a:avLst/>
@@ -3498,38 +3378,38 @@
           <a:effectLst/>
         </p:spPr>
         <p:txBody>
-          <a:bodyPr wrap="none" lIns="27432" rIns="27432" tIns="18288" bIns="18288" anchor="ctr">
+          <a:bodyPr wrap="none" lIns="18288" rIns="18288" tIns="18288" bIns="18288" anchor="t">
             <a:spAutoFit/>
           </a:bodyPr>
           <a:lstStyle/>
           <a:p>
-            <a:pPr algn="l">
+            <a:pPr algn="ctr">
               <a:spcAft>
                 <a:spcPts val="0"/>
               </a:spcAft>
             </a:pPr>
             <a:r>
-              <a:rPr sz="1728" b="0" i="0">
+              <a:rPr sz="1400" b="1" i="0">
                 <a:solidFill>
                   <a:srgbClr val="E7F0F3"/>
                 </a:solidFill>
                 <a:latin typeface="Arial"/>
               </a:rPr>
-              <a:t>Escaped m_esc</a:t>
-            </a:r>
-          </a:p>
-        </p:txBody>
-      </p:sp>
-      <p:sp>
-        <p:nvSpPr>
-          <p:cNvPr id="14" name="text13" descr="sci-ppt:C2-E35-013"/>
+              <a:t>mₗ + mᵥ + m_diss + m_esc = m_PFC,0</a:t>
+            </a:r>
+          </a:p>
+        </p:txBody>
+      </p:sp>
+      <p:sp>
+        <p:nvSpPr>
+          <p:cNvPr id="10" name="C2-E35 text 8" descr="sci-ppt:o008"/>
           <p:cNvSpPr txBox="1"/>
           <p:nvPr/>
         </p:nvSpPr>
         <p:spPr>
           <a:xfrm>
-            <a:off x="1097280" y="4328160"/>
-            <a:ext cx="10363200" cy="377952"/>
+            <a:off x="4389120" y="3291840"/>
+            <a:ext cx="3474720" cy="231648"/>
           </a:xfrm>
           <a:prstGeom prst="rect">
             <a:avLst/>
@@ -3538,38 +3418,70 @@
           <a:effectLst/>
         </p:spPr>
         <p:txBody>
-          <a:bodyPr wrap="none" lIns="27432" rIns="27432" tIns="18288" bIns="18288" anchor="ctr">
+          <a:bodyPr wrap="none" lIns="18288" rIns="18288" tIns="18288" bIns="18288" anchor="t">
             <a:spAutoFit/>
           </a:bodyPr>
           <a:lstStyle/>
           <a:p>
-            <a:pPr algn="l">
+            <a:pPr algn="ctr">
               <a:spcAft>
                 <a:spcPts val="0"/>
               </a:spcAft>
             </a:pPr>
             <a:r>
-              <a:rPr sz="1920" b="0" i="0">
+              <a:rPr sz="1200" b="0" i="0">
                 <a:solidFill>
-                  <a:srgbClr val="E7F0F3"/>
+                  <a:srgbClr val="B4C7D2"/>
                 </a:solidFill>
                 <a:latin typeface="Arial"/>
               </a:rPr>
-              <a:t>Sum of all compartments equals initial inventory.</a:t>
-            </a:r>
-          </a:p>
-        </p:txBody>
-      </p:sp>
-      <p:sp>
-        <p:nvSpPr>
-          <p:cNvPr id="15" name="text14" descr="sci-ppt:C2-E35-014"/>
+              <a:t>no external compound supply</a:t>
+            </a:r>
+          </a:p>
+        </p:txBody>
+      </p:sp>
+      <p:sp>
+        <p:nvSpPr>
+          <p:cNvPr id="11" name="C2-E35 round_rect 9" descr="sci-ppt:o009"/>
+          <p:cNvSpPr/>
+          <p:nvPr/>
+        </p:nvSpPr>
+        <p:spPr>
+          <a:xfrm>
+            <a:off x="8138160" y="1097280"/>
+            <a:ext cx="3657600" cy="2834640"/>
+          </a:xfrm>
+          <a:prstGeom prst="roundRect">
+            <a:avLst/>
+          </a:prstGeom>
+          <a:solidFill>
+            <a:srgbClr val="213E4B"/>
+          </a:solidFill>
+          <a:ln w="20320">
+            <a:solidFill>
+              <a:srgbClr val="7FC8F8"/>
+            </a:solidFill>
+          </a:ln>
+          <a:effectLst/>
+        </p:spPr>
+        <p:txBody>
+          <a:bodyPr rtlCol="0" anchor="ctr"/>
+          <a:lstStyle/>
+          <a:p>
+            <a:pPr algn="ctr"/>
+          </a:p>
+        </p:txBody>
+      </p:sp>
+      <p:sp>
+        <p:nvSpPr>
+          <p:cNvPr id="12" name="C2-E35 text 10" descr="sci-ppt:o010"/>
           <p:cNvSpPr txBox="1"/>
           <p:nvPr/>
         </p:nvSpPr>
         <p:spPr>
           <a:xfrm>
-            <a:off x="365760" y="4974336"/>
-            <a:ext cx="5547360" cy="321259"/>
+            <a:off x="8229600" y="1188720"/>
+            <a:ext cx="3474720" cy="270383"/>
           </a:xfrm>
           <a:prstGeom prst="rect">
             <a:avLst/>
@@ -3578,38 +3490,38 @@
           <a:effectLst/>
         </p:spPr>
         <p:txBody>
-          <a:bodyPr wrap="none" lIns="27432" rIns="27432" tIns="18288" bIns="18288" anchor="ctr">
+          <a:bodyPr wrap="none" lIns="18288" rIns="18288" tIns="18288" bIns="18288" anchor="t">
             <a:spAutoFit/>
           </a:bodyPr>
           <a:lstStyle/>
           <a:p>
-            <a:pPr algn="l">
+            <a:pPr algn="ctr">
               <a:spcAft>
                 <a:spcPts val="0"/>
               </a:spcAft>
             </a:pPr>
             <a:r>
-              <a:rPr sz="1632" b="0" i="0">
+              <a:rPr sz="1450" b="1" i="0">
                 <a:solidFill>
-                  <a:srgbClr val="E7F0F3"/>
+                  <a:srgbClr val="7FC8F8"/>
                 </a:solidFill>
                 <a:latin typeface="Arial"/>
               </a:rPr>
-              <a:t>a₀, ρ_d: initial core</a:t>
-            </a:r>
-          </a:p>
-        </p:txBody>
-      </p:sp>
-      <p:sp>
-        <p:nvSpPr>
-          <p:cNvPr id="16" name="text15" descr="sci-ppt:C2-E35-015"/>
+              <a:t>Vapor pressure</a:t>
+            </a:r>
+          </a:p>
+        </p:txBody>
+      </p:sp>
+      <p:sp>
+        <p:nvSpPr>
+          <p:cNvPr id="13" name="C2-E35 text 11" descr="sci-ppt:o011"/>
           <p:cNvSpPr txBox="1"/>
           <p:nvPr/>
         </p:nvSpPr>
         <p:spPr>
           <a:xfrm>
-            <a:off x="365760" y="5266944"/>
-            <a:ext cx="5547360" cy="321259"/>
+            <a:off x="8229600" y="1920240"/>
+            <a:ext cx="3474720" cy="262636"/>
           </a:xfrm>
           <a:prstGeom prst="rect">
             <a:avLst/>
@@ -3618,38 +3530,38 @@
           <a:effectLst/>
         </p:spPr>
         <p:txBody>
-          <a:bodyPr wrap="none" lIns="27432" rIns="27432" tIns="18288" bIns="18288" anchor="ctr">
+          <a:bodyPr wrap="none" lIns="18288" rIns="18288" tIns="18288" bIns="18288" anchor="t">
             <a:spAutoFit/>
           </a:bodyPr>
           <a:lstStyle/>
           <a:p>
-            <a:pPr algn="l">
+            <a:pPr algn="ctr">
               <a:spcAft>
                 <a:spcPts val="0"/>
               </a:spcAft>
             </a:pPr>
             <a:r>
-              <a:rPr sz="1632" b="0" i="0">
+              <a:rPr sz="1400" b="1" i="0">
                 <a:solidFill>
                   <a:srgbClr val="E7F0F3"/>
                 </a:solidFill>
                 <a:latin typeface="Arial"/>
               </a:rPr>
-              <a:t>m_l, m_v, m_diss, m_esc: compartments</a:t>
-            </a:r>
-          </a:p>
-        </p:txBody>
-      </p:sp>
-      <p:sp>
-        <p:nvSpPr>
-          <p:cNvPr id="17" name="text16" descr="sci-ppt:C2-E35-016"/>
+              <a:t>pᵥ,PFC V_b = (mᵥ / M_PFC) Rᵤ T_b</a:t>
+            </a:r>
+          </a:p>
+        </p:txBody>
+      </p:sp>
+      <p:sp>
+        <p:nvSpPr>
+          <p:cNvPr id="14" name="C2-E35 text 12" descr="sci-ppt:o012"/>
           <p:cNvSpPr txBox="1"/>
           <p:nvPr/>
         </p:nvSpPr>
         <p:spPr>
           <a:xfrm>
-            <a:off x="365760" y="5559552"/>
-            <a:ext cx="5547360" cy="321259"/>
+            <a:off x="8229600" y="3291840"/>
+            <a:ext cx="3474720" cy="231648"/>
           </a:xfrm>
           <a:prstGeom prst="rect">
             <a:avLst/>
@@ -3658,38 +3570,70 @@
           <a:effectLst/>
         </p:spPr>
         <p:txBody>
-          <a:bodyPr wrap="none" lIns="27432" rIns="27432" tIns="18288" bIns="18288" anchor="ctr">
+          <a:bodyPr wrap="none" lIns="18288" rIns="18288" tIns="18288" bIns="18288" anchor="t">
             <a:spAutoFit/>
           </a:bodyPr>
           <a:lstStyle/>
           <a:p>
-            <a:pPr algn="l">
+            <a:pPr algn="ctr">
               <a:spcAft>
                 <a:spcPts val="0"/>
               </a:spcAft>
             </a:pPr>
             <a:r>
-              <a:rPr sz="1632" b="0" i="0">
+              <a:rPr sz="1200" b="0" i="0">
                 <a:solidFill>
-                  <a:srgbClr val="E7F0F3"/>
+                  <a:srgbClr val="B4C7D2"/>
                 </a:solidFill>
                 <a:latin typeface="Arial"/>
               </a:rPr>
-              <a:t>V_b, T_b: bubble state</a:t>
-            </a:r>
-          </a:p>
-        </p:txBody>
-      </p:sp>
-      <p:sp>
-        <p:nvSpPr>
-          <p:cNvPr id="18" name="text17" descr="sci-ppt:C2-E35-017"/>
+              <a:t>ideal PFC partial pressure</a:t>
+            </a:r>
+          </a:p>
+        </p:txBody>
+      </p:sp>
+      <p:sp>
+        <p:nvSpPr>
+          <p:cNvPr id="15" name="C2-E35 round_rect 13" descr="sci-ppt:o013"/>
+          <p:cNvSpPr/>
+          <p:nvPr/>
+        </p:nvSpPr>
+        <p:spPr>
+          <a:xfrm>
+            <a:off x="457200" y="4160520"/>
+            <a:ext cx="11155680" cy="1554480"/>
+          </a:xfrm>
+          <a:prstGeom prst="roundRect">
+            <a:avLst/>
+          </a:prstGeom>
+          <a:solidFill>
+            <a:srgbClr val="213E4B"/>
+          </a:solidFill>
+          <a:ln w="20320">
+            <a:solidFill>
+              <a:srgbClr val="8EDBD4"/>
+            </a:solidFill>
+          </a:ln>
+          <a:effectLst/>
+        </p:spPr>
+        <p:txBody>
+          <a:bodyPr rtlCol="0" anchor="ctr"/>
+          <a:lstStyle/>
+          <a:p>
+            <a:pPr algn="ctr"/>
+          </a:p>
+        </p:txBody>
+      </p:sp>
+      <p:sp>
+        <p:nvSpPr>
+          <p:cNvPr id="16" name="C2-E35 text 14" descr="sci-ppt:o014"/>
           <p:cNvSpPr txBox="1"/>
           <p:nvPr/>
         </p:nvSpPr>
         <p:spPr>
           <a:xfrm>
-            <a:off x="365760" y="5852160"/>
-            <a:ext cx="5547360" cy="321259"/>
+            <a:off x="566928" y="4215383"/>
+            <a:ext cx="10936224" cy="254889"/>
           </a:xfrm>
           <a:prstGeom prst="rect">
             <a:avLst/>
@@ -3698,7 +3642,7 @@
           <a:effectLst/>
         </p:spPr>
         <p:txBody>
-          <a:bodyPr wrap="none" lIns="27432" rIns="27432" tIns="18288" bIns="18288" anchor="ctr">
+          <a:bodyPr wrap="none" lIns="18288" rIns="18288" tIns="18288" bIns="18288" anchor="t">
             <a:spAutoFit/>
           </a:bodyPr>
           <a:lstStyle/>
@@ -3709,27 +3653,27 @@
               </a:spcAft>
             </a:pPr>
             <a:r>
-              <a:rPr sz="1632" b="0" i="0">
+              <a:rPr sz="1350" b="1" i="0">
                 <a:solidFill>
-                  <a:srgbClr val="E7F0F3"/>
+                  <a:srgbClr val="8EDBD4"/>
                 </a:solidFill>
                 <a:latin typeface="Arial"/>
               </a:rPr>
-              <a:t>π: initial sphere</a:t>
-            </a:r>
-          </a:p>
-        </p:txBody>
-      </p:sp>
-      <p:sp>
-        <p:nvSpPr>
-          <p:cNvPr id="19" name="text18" descr="sci-ppt:C2-E35-018"/>
+              <a:t>How the three connect</a:t>
+            </a:r>
+          </a:p>
+        </p:txBody>
+      </p:sp>
+      <p:sp>
+        <p:nvSpPr>
+          <p:cNvPr id="17" name="C2-E35 text 15" descr="sci-ppt:o015"/>
           <p:cNvSpPr txBox="1"/>
           <p:nvPr/>
         </p:nvSpPr>
         <p:spPr>
           <a:xfrm>
-            <a:off x="6156960" y="4974336"/>
-            <a:ext cx="5547360" cy="321259"/>
+            <a:off x="594360" y="4572000"/>
+            <a:ext cx="10881360" cy="247142"/>
           </a:xfrm>
           <a:prstGeom prst="rect">
             <a:avLst/>
@@ -3738,7 +3682,7 @@
           <a:effectLst/>
         </p:spPr>
         <p:txBody>
-          <a:bodyPr wrap="none" lIns="27432" rIns="27432" tIns="18288" bIns="18288" anchor="ctr">
+          <a:bodyPr wrap="none" lIns="18288" rIns="18288" tIns="18288" bIns="18288" anchor="t">
             <a:spAutoFit/>
           </a:bodyPr>
           <a:lstStyle/>
@@ -3749,27 +3693,27 @@
               </a:spcAft>
             </a:pPr>
             <a:r>
-              <a:rPr sz="1632" b="0" i="0">
+              <a:rPr sz="1300" b="0" i="0">
                 <a:solidFill>
                   <a:srgbClr val="E7F0F3"/>
                 </a:solidFill>
                 <a:latin typeface="Arial"/>
               </a:rPr>
-              <a:t>m_PFC,0: total supply</a:t>
-            </a:r>
-          </a:p>
-        </p:txBody>
-      </p:sp>
-      <p:sp>
-        <p:nvSpPr>
-          <p:cNvPr id="20" name="text19" descr="sci-ppt:C2-E35-019"/>
+              <a:t>The mass ledger caps mᵥ; the gas law turns mᵥ into a pressure; the pressure feeds the radius equation of Chapter 1.</a:t>
+            </a:r>
+          </a:p>
+        </p:txBody>
+      </p:sp>
+      <p:sp>
+        <p:nvSpPr>
+          <p:cNvPr id="18" name="C2-E35 text 16" descr="sci-ppt:o016"/>
           <p:cNvSpPr txBox="1"/>
           <p:nvPr/>
         </p:nvSpPr>
         <p:spPr>
           <a:xfrm>
-            <a:off x="6156960" y="5266944"/>
-            <a:ext cx="5547360" cy="321259"/>
+            <a:off x="594360" y="5120640"/>
+            <a:ext cx="10881360" cy="239395"/>
           </a:xfrm>
           <a:prstGeom prst="rect">
             <a:avLst/>
@@ -3778,7 +3722,7 @@
           <a:effectLst/>
         </p:spPr>
         <p:txBody>
-          <a:bodyPr wrap="none" lIns="27432" rIns="27432" tIns="18288" bIns="18288" anchor="ctr">
+          <a:bodyPr wrap="none" lIns="18288" rIns="18288" tIns="18288" bIns="18288" anchor="t">
             <a:spAutoFit/>
           </a:bodyPr>
           <a:lstStyle/>
@@ -3789,27 +3733,27 @@
               </a:spcAft>
             </a:pPr>
             <a:r>
-              <a:rPr sz="1632" b="0" i="0">
+              <a:rPr sz="1250" b="0" i="0">
                 <a:solidFill>
-                  <a:srgbClr val="E7F0F3"/>
+                  <a:srgbClr val="F2B880"/>
                 </a:solidFill>
                 <a:latin typeface="Arial"/>
               </a:rPr>
-              <a:t>p_v,PFC: partial pressure</a:t>
-            </a:r>
-          </a:p>
-        </p:txBody>
-      </p:sp>
-      <p:sp>
-        <p:nvSpPr>
-          <p:cNvPr id="21" name="text20" descr="sci-ppt:C2-E35-020"/>
+              <a:t>If mᵥ never exceeds m_PFC,0, then the vapor pressure at fixed V_b and T_b cannot exceed m_PFC,0 Rᵤ T_b / (M_PFC V_b).</a:t>
+            </a:r>
+          </a:p>
+        </p:txBody>
+      </p:sp>
+      <p:sp>
+        <p:nvSpPr>
+          <p:cNvPr id="19" name="C2-E35 text 17" descr="sci-ppt:o017"/>
           <p:cNvSpPr txBox="1"/>
           <p:nvPr/>
         </p:nvSpPr>
         <p:spPr>
           <a:xfrm>
-            <a:off x="6156960" y="5559552"/>
-            <a:ext cx="5547360" cy="321259"/>
+            <a:off x="320040" y="6510528"/>
+            <a:ext cx="11521440" cy="200660"/>
           </a:xfrm>
           <a:prstGeom prst="rect">
             <a:avLst/>
@@ -3818,7 +3762,7 @@
           <a:effectLst/>
         </p:spPr>
         <p:txBody>
-          <a:bodyPr wrap="none" lIns="27432" rIns="27432" tIns="18288" bIns="18288" anchor="ctr">
+          <a:bodyPr wrap="none" lIns="18288" rIns="18288" tIns="18288" bIns="18288" anchor="t">
             <a:spAutoFit/>
           </a:bodyPr>
           <a:lstStyle/>
@@ -3829,93 +3773,13 @@
               </a:spcAft>
             </a:pPr>
             <a:r>
-              <a:rPr sz="1632" b="0" i="0">
-                <a:solidFill>
-                  <a:srgbClr val="E7F0F3"/>
-                </a:solidFill>
-                <a:latin typeface="Arial"/>
-              </a:rPr>
-              <a:t>M_PFC, R_u: ideal conversion</a:t>
-            </a:r>
-          </a:p>
-        </p:txBody>
-      </p:sp>
-      <p:sp>
-        <p:nvSpPr>
-          <p:cNvPr id="22" name="text21" descr="sci-ppt:C2-E35-021"/>
-          <p:cNvSpPr txBox="1"/>
-          <p:nvPr/>
-        </p:nvSpPr>
-        <p:spPr>
-          <a:xfrm>
-            <a:off x="365760" y="6339840"/>
-            <a:ext cx="11277600" cy="302361"/>
-          </a:xfrm>
-          <a:prstGeom prst="rect">
-            <a:avLst/>
-          </a:prstGeom>
-          <a:noFill/>
-          <a:effectLst/>
-        </p:spPr>
-        <p:txBody>
-          <a:bodyPr wrap="none" lIns="27432" rIns="27432" tIns="18288" bIns="18288" anchor="ctr">
-            <a:spAutoFit/>
-          </a:bodyPr>
-          <a:lstStyle/>
-          <a:p>
-            <a:pPr algn="l">
-              <a:spcAft>
-                <a:spcPts val="0"/>
-              </a:spcAft>
-            </a:pPr>
-            <a:r>
-              <a:rPr sz="1536" b="0" i="0">
+              <a:rPr sz="1000" b="0" i="0">
                 <a:solidFill>
                   <a:srgbClr val="B4C7D2"/>
                 </a:solidFill>
                 <a:latin typeface="Arial"/>
               </a:rPr>
-              <a:t>All compound compartments sum to the original mass</a:t>
-            </a:r>
-          </a:p>
-        </p:txBody>
-      </p:sp>
-      <p:sp>
-        <p:nvSpPr>
-          <p:cNvPr id="23" name="text22" descr="sci-ppt:C2-E35-022"/>
-          <p:cNvSpPr txBox="1"/>
-          <p:nvPr/>
-        </p:nvSpPr>
-        <p:spPr>
-          <a:xfrm>
-            <a:off x="365760" y="6632448"/>
-            <a:ext cx="11277600" cy="302361"/>
-          </a:xfrm>
-          <a:prstGeom prst="rect">
-            <a:avLst/>
-          </a:prstGeom>
-          <a:noFill/>
-          <a:effectLst/>
-        </p:spPr>
-        <p:txBody>
-          <a:bodyPr wrap="none" lIns="27432" rIns="27432" tIns="18288" bIns="18288" anchor="ctr">
-            <a:spAutoFit/>
-          </a:bodyPr>
-          <a:lstStyle/>
-          <a:p>
-            <a:pPr algn="l">
-              <a:spcAft>
-                <a:spcPts val="0"/>
-              </a:spcAft>
-            </a:pPr>
-            <a:r>
-              <a:rPr sz="1536" b="0" i="0">
-                <a:solidFill>
-                  <a:srgbClr val="B4C7D2"/>
-                </a:solidFill>
-                <a:latin typeface="Arial"/>
-              </a:rPr>
-              <a:t>Water cannot be a source of unlimited PFC vapor</a:t>
+              <a:t>Reference formulas of the Defence 3 answer: Eqs. C2-E18, E24, E27.</a:t>
             </a:r>
           </a:p>
         </p:txBody>
